--- a/courseware/202609_DSA_MOOC_Quiz_CH11-12.pptx
+++ b/courseware/202609_DSA_MOOC_Quiz_CH11-12.pptx
@@ -31444,7 +31444,7 @@
         <p:spPr>
           <a:xfrm>
             <a:off x="7818120" y="2651760"/>
-            <a:ext cx="3520440" cy="339852"/>
+            <a:ext cx="3520440" cy="909828"/>
           </a:xfrm>
           <a:prstGeom prst="rect">
             <a:avLst/>
@@ -31490,7 +31490,29 @@
                 <a:ea typeface="Microsoft YaHei" pitchFamily="34" charset="-122"/>
                 <a:cs typeface="Microsoft YaHei" pitchFamily="34" charset="-120"/>
               </a:rPr>
-              <a:t>(n + 1)。</a:t>
+              <a:t>(n + 1)（只数内部结点；原书连空叶算，写作 2 log</a:t>
+            </a:r>
+            <a:r>
+              <a:rPr lang="en-US" sz="1700" baseline="-40000" dirty="0">
+                <a:solidFill>
+                  <a:srgbClr val="2B2B2B"/>
+                </a:solidFill>
+                <a:latin typeface="Microsoft YaHei" pitchFamily="34" charset="0"/>
+                <a:ea typeface="Microsoft YaHei" pitchFamily="34" charset="-122"/>
+                <a:cs typeface="Microsoft YaHei" pitchFamily="34" charset="-120"/>
+              </a:rPr>
+              <a:t>2</a:t>
+            </a:r>
+            <a:r>
+              <a:rPr lang="en-US" sz="1700" dirty="0">
+                <a:solidFill>
+                  <a:srgbClr val="2B2B2B"/>
+                </a:solidFill>
+                <a:latin typeface="Microsoft YaHei" pitchFamily="34" charset="0"/>
+                <a:ea typeface="Microsoft YaHei" pitchFamily="34" charset="-122"/>
+                <a:cs typeface="Microsoft YaHei" pitchFamily="34" charset="-120"/>
+              </a:rPr>
+              <a:t>(n + 1) + 1）。</a:t>
             </a:r>
             <a:endParaRPr lang="en-US" sz="1700" dirty="0"/>
           </a:p>
@@ -31504,7 +31526,7 @@
         </p:nvSpPr>
         <p:spPr>
           <a:xfrm>
-            <a:off x="7616952" y="3228289"/>
+            <a:off x="7616952" y="3798265"/>
             <a:ext cx="91440" cy="91440"/>
           </a:xfrm>
           <a:prstGeom prst="ellipse">
@@ -31524,7 +31546,7 @@
         </p:nvSpPr>
         <p:spPr>
           <a:xfrm>
-            <a:off x="7818120" y="3131515"/>
+            <a:off x="7818120" y="3701491"/>
             <a:ext cx="3520440" cy="909828"/>
           </a:xfrm>
           <a:prstGeom prst="rect">

--- a/courseware/202609_DSA_MOOC_Quiz_CH11-12.pptx
+++ b/courseware/202609_DSA_MOOC_Quiz_CH11-12.pptx
@@ -18464,7 +18464,7 @@
                 <a:ea typeface="Microsoft YaHei" pitchFamily="34" charset="-122"/>
                 <a:cs typeface="Microsoft YaHei" pitchFamily="34" charset="-120"/>
               </a:rPr>
-              <a:t>另一组操作序列（见原题）形成的 Splay 树是：</a:t>
+              <a:t>【待补题干】原资料缺少操作序列，本页暂不作答。</a:t>
             </a:r>
             <a:endParaRPr lang="en-US" sz="1560" dirty="0"/>
           </a:p>
@@ -19005,31 +19005,6 @@
       <p:sp>
         <p:nvSpPr>
           <p:cNvPr id="17" name="ANS_206"/>
-          <p:cNvSpPr/>
-          <p:nvPr/>
-        </p:nvSpPr>
-        <p:spPr>
-          <a:xfrm>
-            <a:off x="548640" y="4728180"/>
-            <a:ext cx="3086100" cy="641909"/>
-          </a:xfrm>
-          <a:prstGeom prst="roundRect">
-            <a:avLst>
-              <a:gd name="adj" fmla="val 14245"/>
-            </a:avLst>
-          </a:prstGeom>
-          <a:noFill/>
-          <a:ln w="38100">
-            <a:solidFill>
-              <a:srgbClr val="2E9E6B"/>
-            </a:solidFill>
-            <a:prstDash val="solid"/>
-          </a:ln>
-        </p:spPr>
-      </p:sp>
-      <p:sp>
-        <p:nvSpPr>
-          <p:cNvPr id="18" name="ANS_207"/>
           <p:cNvSpPr/>
           <p:nvPr/>
         </p:nvSpPr>
@@ -19056,14 +19031,53 @@
       </p:sp>
       <p:sp>
         <p:nvSpPr>
+          <p:cNvPr id="18" name="ANS_207"/>
+          <p:cNvSpPr txBox="1"/>
+          <p:nvPr/>
+        </p:nvSpPr>
+        <p:spPr>
+          <a:xfrm>
+            <a:off x="7589520" y="685800"/>
+            <a:ext cx="1828800" cy="365760"/>
+          </a:xfrm>
+          <a:prstGeom prst="rect">
+            <a:avLst/>
+          </a:prstGeom>
+          <a:noFill/>
+          <a:ln/>
+        </p:spPr>
+        <p:txBody>
+          <a:bodyPr wrap="square" lIns="0" tIns="0" rIns="0" bIns="0" rtlCol="0" anchor="ctr"/>
+          <a:lstStyle/>
+          <a:p>
+            <a:pPr algn="l" indent="0" marL="0">
+              <a:buNone/>
+            </a:pPr>
+            <a:r>
+              <a:rPr lang="en-US" sz="1600" b="1" dirty="0">
+                <a:solidFill>
+                  <a:srgbClr val="A06A00"/>
+                </a:solidFill>
+                <a:latin typeface="Microsoft YaHei" pitchFamily="34" charset="0"/>
+                <a:ea typeface="Microsoft YaHei" pitchFamily="34" charset="-122"/>
+                <a:cs typeface="Microsoft YaHei" pitchFamily="34" charset="-120"/>
+              </a:rPr>
+              <a:t>答案</a:t>
+            </a:r>
+            <a:endParaRPr lang="en-US" sz="1600" dirty="0"/>
+          </a:p>
+        </p:txBody>
+      </p:sp>
+      <p:sp>
+        <p:nvSpPr>
           <p:cNvPr id="19" name="ANS_208"/>
           <p:cNvSpPr txBox="1"/>
           <p:nvPr/>
         </p:nvSpPr>
         <p:spPr>
           <a:xfrm>
-            <a:off x="7589520" y="685800"/>
-            <a:ext cx="1828800" cy="365760"/>
+            <a:off x="7589520" y="1097280"/>
+            <a:ext cx="3749040" cy="868680"/>
           </a:xfrm>
           <a:prstGeom prst="rect">
             <a:avLst/>
@@ -19079,17 +19093,17 @@
               <a:buNone/>
             </a:pPr>
             <a:r>
-              <a:rPr lang="en-US" sz="1600" b="1" dirty="0">
-                <a:solidFill>
-                  <a:srgbClr val="A06A00"/>
-                </a:solidFill>
-                <a:latin typeface="Microsoft YaHei" pitchFamily="34" charset="0"/>
-                <a:ea typeface="Microsoft YaHei" pitchFamily="34" charset="-122"/>
-                <a:cs typeface="Microsoft YaHei" pitchFamily="34" charset="-120"/>
-              </a:rPr>
-              <a:t>答案</a:t>
-            </a:r>
-            <a:endParaRPr lang="en-US" sz="1600" dirty="0"/>
+              <a:rPr lang="en-US" sz="4400" b="1" dirty="0">
+                <a:solidFill>
+                  <a:srgbClr val="1E3D34"/>
+                </a:solidFill>
+                <a:latin typeface="Microsoft YaHei" pitchFamily="34" charset="0"/>
+                <a:ea typeface="Microsoft YaHei" pitchFamily="34" charset="-122"/>
+                <a:cs typeface="Microsoft YaHei" pitchFamily="34" charset="-120"/>
+              </a:rPr>
+              <a:t>待补题干</a:t>
+            </a:r>
+            <a:endParaRPr lang="en-US" sz="4400" dirty="0"/>
           </a:p>
         </p:txBody>
       </p:sp>
@@ -19101,45 +19115,6 @@
         </p:nvSpPr>
         <p:spPr>
           <a:xfrm>
-            <a:off x="7589520" y="1097280"/>
-            <a:ext cx="3749040" cy="868680"/>
-          </a:xfrm>
-          <a:prstGeom prst="rect">
-            <a:avLst/>
-          </a:prstGeom>
-          <a:noFill/>
-          <a:ln/>
-        </p:spPr>
-        <p:txBody>
-          <a:bodyPr wrap="square" lIns="0" tIns="0" rIns="0" bIns="0" rtlCol="0" anchor="ctr"/>
-          <a:lstStyle/>
-          <a:p>
-            <a:pPr algn="l" indent="0" marL="0">
-              <a:buNone/>
-            </a:pPr>
-            <a:r>
-              <a:rPr lang="en-US" sz="4400" b="1" dirty="0">
-                <a:solidFill>
-                  <a:srgbClr val="1E3D34"/>
-                </a:solidFill>
-                <a:latin typeface="Microsoft YaHei" pitchFamily="34" charset="0"/>
-                <a:ea typeface="Microsoft YaHei" pitchFamily="34" charset="-122"/>
-                <a:cs typeface="Microsoft YaHei" pitchFamily="34" charset="-120"/>
-              </a:rPr>
-              <a:t>A</a:t>
-            </a:r>
-            <a:endParaRPr lang="en-US" sz="4400" dirty="0"/>
-          </a:p>
-        </p:txBody>
-      </p:sp>
-      <p:sp>
-        <p:nvSpPr>
-          <p:cNvPr id="21" name="ANS_210"/>
-          <p:cNvSpPr txBox="1"/>
-          <p:nvPr/>
-        </p:nvSpPr>
-        <p:spPr>
-          <a:xfrm>
             <a:off x="7589520" y="2194560"/>
             <a:ext cx="1828800" cy="365760"/>
           </a:xfrm>
@@ -19173,7 +19148,7 @@
       </p:sp>
       <p:sp>
         <p:nvSpPr>
-          <p:cNvPr id="22" name="ANS_211"/>
+          <p:cNvPr id="21" name="ANS_210"/>
           <p:cNvSpPr/>
           <p:nvPr/>
         </p:nvSpPr>
@@ -19193,7 +19168,7 @@
       </p:sp>
       <p:sp>
         <p:nvSpPr>
-          <p:cNvPr id="23" name="ANS_212"/>
+          <p:cNvPr id="22" name="ANS_211"/>
           <p:cNvSpPr txBox="1"/>
           <p:nvPr/>
         </p:nvSpPr>
@@ -19232,7 +19207,7 @@
       </p:sp>
       <p:sp>
         <p:nvSpPr>
-          <p:cNvPr id="24" name="ANS_213"/>
+          <p:cNvPr id="23" name="ANS_212"/>
           <p:cNvSpPr/>
           <p:nvPr/>
         </p:nvSpPr>
@@ -19252,14 +19227,14 @@
       </p:sp>
       <p:sp>
         <p:nvSpPr>
-          <p:cNvPr id="25" name="ANS_214"/>
+          <p:cNvPr id="24" name="ANS_213"/>
           <p:cNvSpPr txBox="1"/>
           <p:nvPr/>
         </p:nvSpPr>
         <p:spPr>
           <a:xfrm>
             <a:off x="7818120" y="3701491"/>
-            <a:ext cx="3520440" cy="339852"/>
+            <a:ext cx="3520440" cy="624840"/>
           </a:xfrm>
           <a:prstGeom prst="rect">
             <a:avLst/>
@@ -19283,7 +19258,7 @@
                 <a:ea typeface="Microsoft YaHei" pitchFamily="34" charset="-122"/>
                 <a:cs typeface="Microsoft YaHei" pitchFamily="34" charset="-120"/>
               </a:rPr>
-              <a:t>按原题操作序列逐步模拟即得 A。</a:t>
+              <a:t>补齐操作序列与删除约定后，重新模拟并确定答案。</a:t>
             </a:r>
             <a:endParaRPr lang="en-US" sz="1700" dirty="0"/>
           </a:p>
@@ -19588,41 +19563,6 @@
                                         <p:cTn id="28" dur="400"/>
                                         <p:tgtEl>
                                           <p:spTgt spid="24"/>
-                                        </p:tgtEl>
-                                      </p:cBhvr>
-                                    </p:animEffect>
-                                  </p:childTnLst>
-                                </p:cTn>
-                              </p:par>
-                              <p:par>
-                                <p:cTn id="29" presetID="10" presetClass="entr" presetSubtype="0" fill="hold" grpId="0" nodeType="withEffect">
-                                  <p:stCondLst>
-                                    <p:cond delay="0"/>
-                                  </p:stCondLst>
-                                  <p:childTnLst>
-                                    <p:set>
-                                      <p:cBhvr>
-                                        <p:cTn id="30" dur="1" fill="hold">
-                                          <p:stCondLst>
-                                            <p:cond delay="0"/>
-                                          </p:stCondLst>
-                                        </p:cTn>
-                                        <p:tgtEl>
-                                          <p:spTgt spid="25"/>
-                                        </p:tgtEl>
-                                        <p:attrNameLst>
-                                          <p:attrName>style.visibility</p:attrName>
-                                        </p:attrNameLst>
-                                      </p:cBhvr>
-                                      <p:to>
-                                        <p:strVal val="visible"/>
-                                      </p:to>
-                                    </p:set>
-                                    <p:animEffect transition="in" filter="fade">
-                                      <p:cBhvr>
-                                        <p:cTn id="31" dur="400"/>
-                                        <p:tgtEl>
-                                          <p:spTgt spid="25"/>
                                         </p:tgtEl>
                                       </p:cBhvr>
                                     </p:animEffect>
@@ -19665,7 +19605,6 @@
       <p:bldP spid="22" grpId="0" animBg="1"/>
       <p:bldP spid="23" grpId="0" animBg="1"/>
       <p:bldP spid="24" grpId="0" animBg="1"/>
-      <p:bldP spid="25" grpId="0" animBg="1"/>
     </p:bldLst>
   </p:timing>
 </p:sld>
@@ -20409,7 +20348,7 @@
       </p:sp>
       <p:sp>
         <p:nvSpPr>
-          <p:cNvPr id="21" name="ANS_215"/>
+          <p:cNvPr id="21" name="ANS_214"/>
           <p:cNvSpPr/>
           <p:nvPr/>
         </p:nvSpPr>
@@ -20434,7 +20373,7 @@
       </p:sp>
       <p:sp>
         <p:nvSpPr>
-          <p:cNvPr id="22" name="ANS_216"/>
+          <p:cNvPr id="22" name="ANS_215"/>
           <p:cNvSpPr/>
           <p:nvPr/>
         </p:nvSpPr>
@@ -20461,7 +20400,7 @@
       </p:sp>
       <p:sp>
         <p:nvSpPr>
-          <p:cNvPr id="23" name="ANS_217"/>
+          <p:cNvPr id="23" name="ANS_216"/>
           <p:cNvSpPr txBox="1"/>
           <p:nvPr/>
         </p:nvSpPr>
@@ -20500,7 +20439,7 @@
       </p:sp>
       <p:sp>
         <p:nvSpPr>
-          <p:cNvPr id="24" name="ANS_218"/>
+          <p:cNvPr id="24" name="ANS_217"/>
           <p:cNvSpPr txBox="1"/>
           <p:nvPr/>
         </p:nvSpPr>
@@ -20539,7 +20478,7 @@
       </p:sp>
       <p:sp>
         <p:nvSpPr>
-          <p:cNvPr id="25" name="ANS_219"/>
+          <p:cNvPr id="25" name="ANS_218"/>
           <p:cNvSpPr txBox="1"/>
           <p:nvPr/>
         </p:nvSpPr>
@@ -20578,7 +20517,7 @@
       </p:sp>
       <p:sp>
         <p:nvSpPr>
-          <p:cNvPr id="26" name="ANS_220"/>
+          <p:cNvPr id="26" name="ANS_219"/>
           <p:cNvSpPr/>
           <p:nvPr/>
         </p:nvSpPr>
@@ -20598,7 +20537,7 @@
       </p:sp>
       <p:sp>
         <p:nvSpPr>
-          <p:cNvPr id="27" name="ANS_221"/>
+          <p:cNvPr id="27" name="ANS_220"/>
           <p:cNvSpPr txBox="1"/>
           <p:nvPr/>
         </p:nvSpPr>
@@ -20629,7 +20568,7 @@
                 <a:ea typeface="Microsoft YaHei" pitchFamily="34" charset="-122"/>
                 <a:cs typeface="Microsoft YaHei" pitchFamily="34" charset="-120"/>
               </a:rPr>
-              <a:t>A：6、15、3、5 不失衡；插 4 时 6 的左子树为 3(−, 5(4, −))，LR 型双旋 → 4(3, 6(5, 15))；再插 1 ✓</a:t>
+              <a:t>A：插 4 时结点 3 发生 RL 双旋，得 6(4(3, 5), 15)；插 1 后结点 6 发生 LL 单旋，得 4(3(1, −), 6(5, 15)) ✓</a:t>
             </a:r>
             <a:endParaRPr lang="en-US" sz="1700" dirty="0"/>
           </a:p>
@@ -20637,7 +20576,7 @@
       </p:sp>
       <p:sp>
         <p:nvSpPr>
-          <p:cNvPr id="28" name="ANS_222"/>
+          <p:cNvPr id="28" name="ANS_221"/>
           <p:cNvSpPr/>
           <p:nvPr/>
         </p:nvSpPr>
@@ -20657,7 +20596,7 @@
       </p:sp>
       <p:sp>
         <p:nvSpPr>
-          <p:cNvPr id="29" name="ANS_223"/>
+          <p:cNvPr id="29" name="ANS_222"/>
           <p:cNvSpPr txBox="1"/>
           <p:nvPr/>
         </p:nvSpPr>
@@ -20696,7 +20635,7 @@
       </p:sp>
       <p:sp>
         <p:nvSpPr>
-          <p:cNvPr id="30" name="ANS_224"/>
+          <p:cNvPr id="30" name="ANS_223"/>
           <p:cNvSpPr/>
           <p:nvPr/>
         </p:nvSpPr>
@@ -20716,7 +20655,7 @@
       </p:sp>
       <p:sp>
         <p:nvSpPr>
-          <p:cNvPr id="31" name="ANS_225"/>
+          <p:cNvPr id="31" name="ANS_224"/>
           <p:cNvSpPr txBox="1"/>
           <p:nvPr/>
         </p:nvSpPr>
@@ -21553,7 +21492,7 @@
       </p:sp>
       <p:sp>
         <p:nvSpPr>
-          <p:cNvPr id="9" name="ANS_226"/>
+          <p:cNvPr id="9" name="ANS_225"/>
           <p:cNvSpPr/>
           <p:nvPr/>
         </p:nvSpPr>
@@ -21580,7 +21519,7 @@
       </p:sp>
       <p:sp>
         <p:nvSpPr>
-          <p:cNvPr id="10" name="ANS_227"/>
+          <p:cNvPr id="10" name="ANS_226"/>
           <p:cNvSpPr txBox="1"/>
           <p:nvPr/>
         </p:nvSpPr>
@@ -21619,7 +21558,7 @@
       </p:sp>
       <p:sp>
         <p:nvSpPr>
-          <p:cNvPr id="11" name="ANS_228"/>
+          <p:cNvPr id="11" name="ANS_227"/>
           <p:cNvSpPr txBox="1"/>
           <p:nvPr/>
         </p:nvSpPr>
@@ -21658,7 +21597,7 @@
       </p:sp>
       <p:sp>
         <p:nvSpPr>
-          <p:cNvPr id="12" name="ANS_229"/>
+          <p:cNvPr id="12" name="ANS_228"/>
           <p:cNvSpPr txBox="1"/>
           <p:nvPr/>
         </p:nvSpPr>
@@ -21697,7 +21636,7 @@
       </p:sp>
       <p:sp>
         <p:nvSpPr>
-          <p:cNvPr id="13" name="ANS_230"/>
+          <p:cNvPr id="13" name="ANS_229"/>
           <p:cNvSpPr/>
           <p:nvPr/>
         </p:nvSpPr>
@@ -21717,7 +21656,7 @@
       </p:sp>
       <p:sp>
         <p:nvSpPr>
-          <p:cNvPr id="14" name="ANS_231"/>
+          <p:cNvPr id="14" name="ANS_230"/>
           <p:cNvSpPr txBox="1"/>
           <p:nvPr/>
         </p:nvSpPr>
@@ -21756,7 +21695,7 @@
       </p:sp>
       <p:sp>
         <p:nvSpPr>
-          <p:cNvPr id="15" name="ANS_232"/>
+          <p:cNvPr id="15" name="ANS_231"/>
           <p:cNvSpPr/>
           <p:nvPr/>
         </p:nvSpPr>
@@ -21776,7 +21715,7 @@
       </p:sp>
       <p:sp>
         <p:nvSpPr>
-          <p:cNvPr id="16" name="ANS_233"/>
+          <p:cNvPr id="16" name="ANS_232"/>
           <p:cNvSpPr txBox="1"/>
           <p:nvPr/>
         </p:nvSpPr>
@@ -21815,7 +21754,7 @@
       </p:sp>
       <p:sp>
         <p:nvSpPr>
-          <p:cNvPr id="17" name="ANS_234"/>
+          <p:cNvPr id="17" name="ANS_233"/>
           <p:cNvSpPr/>
           <p:nvPr/>
         </p:nvSpPr>
@@ -21835,7 +21774,7 @@
       </p:sp>
       <p:sp>
         <p:nvSpPr>
-          <p:cNvPr id="18" name="ANS_235"/>
+          <p:cNvPr id="18" name="ANS_234"/>
           <p:cNvSpPr txBox="1"/>
           <p:nvPr/>
         </p:nvSpPr>
@@ -22884,7 +22823,7 @@
       </p:sp>
       <p:sp>
         <p:nvSpPr>
-          <p:cNvPr id="19" name="ANS_236"/>
+          <p:cNvPr id="19" name="ANS_235"/>
           <p:cNvSpPr/>
           <p:nvPr/>
         </p:nvSpPr>
@@ -22909,7 +22848,7 @@
       </p:sp>
       <p:sp>
         <p:nvSpPr>
-          <p:cNvPr id="20" name="ANS_237"/>
+          <p:cNvPr id="20" name="ANS_236"/>
           <p:cNvSpPr/>
           <p:nvPr/>
         </p:nvSpPr>
@@ -22934,7 +22873,7 @@
       </p:sp>
       <p:sp>
         <p:nvSpPr>
-          <p:cNvPr id="21" name="ANS_238"/>
+          <p:cNvPr id="21" name="ANS_237"/>
           <p:cNvSpPr/>
           <p:nvPr/>
         </p:nvSpPr>
@@ -22959,7 +22898,7 @@
       </p:sp>
       <p:sp>
         <p:nvSpPr>
-          <p:cNvPr id="22" name="ANS_239"/>
+          <p:cNvPr id="22" name="ANS_238"/>
           <p:cNvSpPr/>
           <p:nvPr/>
         </p:nvSpPr>
@@ -22986,7 +22925,7 @@
       </p:sp>
       <p:sp>
         <p:nvSpPr>
-          <p:cNvPr id="23" name="ANS_240"/>
+          <p:cNvPr id="23" name="ANS_239"/>
           <p:cNvSpPr txBox="1"/>
           <p:nvPr/>
         </p:nvSpPr>
@@ -23025,7 +22964,7 @@
       </p:sp>
       <p:sp>
         <p:nvSpPr>
-          <p:cNvPr id="24" name="ANS_241"/>
+          <p:cNvPr id="24" name="ANS_240"/>
           <p:cNvSpPr txBox="1"/>
           <p:nvPr/>
         </p:nvSpPr>
@@ -23064,7 +23003,7 @@
       </p:sp>
       <p:sp>
         <p:nvSpPr>
-          <p:cNvPr id="25" name="ANS_242"/>
+          <p:cNvPr id="25" name="ANS_241"/>
           <p:cNvSpPr txBox="1"/>
           <p:nvPr/>
         </p:nvSpPr>
@@ -23103,7 +23042,7 @@
       </p:sp>
       <p:sp>
         <p:nvSpPr>
-          <p:cNvPr id="26" name="ANS_243"/>
+          <p:cNvPr id="26" name="ANS_242"/>
           <p:cNvSpPr/>
           <p:nvPr/>
         </p:nvSpPr>
@@ -23123,7 +23062,7 @@
       </p:sp>
       <p:sp>
         <p:nvSpPr>
-          <p:cNvPr id="27" name="ANS_244"/>
+          <p:cNvPr id="27" name="ANS_243"/>
           <p:cNvSpPr txBox="1"/>
           <p:nvPr/>
         </p:nvSpPr>
@@ -23162,7 +23101,7 @@
       </p:sp>
       <p:sp>
         <p:nvSpPr>
-          <p:cNvPr id="28" name="ANS_245"/>
+          <p:cNvPr id="28" name="ANS_244"/>
           <p:cNvSpPr/>
           <p:nvPr/>
         </p:nvSpPr>
@@ -23182,7 +23121,7 @@
       </p:sp>
       <p:sp>
         <p:nvSpPr>
-          <p:cNvPr id="29" name="ANS_246"/>
+          <p:cNvPr id="29" name="ANS_245"/>
           <p:cNvSpPr txBox="1"/>
           <p:nvPr/>
         </p:nvSpPr>
@@ -23221,7 +23160,7 @@
       </p:sp>
       <p:sp>
         <p:nvSpPr>
-          <p:cNvPr id="30" name="ANS_247"/>
+          <p:cNvPr id="30" name="ANS_246"/>
           <p:cNvSpPr/>
           <p:nvPr/>
         </p:nvSpPr>
@@ -23241,7 +23180,7 @@
       </p:sp>
       <p:sp>
         <p:nvSpPr>
-          <p:cNvPr id="31" name="ANS_248"/>
+          <p:cNvPr id="31" name="ANS_247"/>
           <p:cNvSpPr txBox="1"/>
           <p:nvPr/>
         </p:nvSpPr>
@@ -24006,7 +23945,7 @@
       </p:sp>
       <p:sp>
         <p:nvSpPr>
-          <p:cNvPr id="7" name="ANS_249"/>
+          <p:cNvPr id="7" name="ANS_248"/>
           <p:cNvSpPr/>
           <p:nvPr/>
         </p:nvSpPr>
@@ -24033,7 +23972,7 @@
       </p:sp>
       <p:sp>
         <p:nvSpPr>
-          <p:cNvPr id="8" name="ANS_250"/>
+          <p:cNvPr id="8" name="ANS_249"/>
           <p:cNvSpPr txBox="1"/>
           <p:nvPr/>
         </p:nvSpPr>
@@ -24072,7 +24011,7 @@
       </p:sp>
       <p:sp>
         <p:nvSpPr>
-          <p:cNvPr id="9" name="ANS_251"/>
+          <p:cNvPr id="9" name="ANS_250"/>
           <p:cNvSpPr txBox="1"/>
           <p:nvPr/>
         </p:nvSpPr>
@@ -24111,7 +24050,7 @@
       </p:sp>
       <p:sp>
         <p:nvSpPr>
-          <p:cNvPr id="10" name="ANS_252"/>
+          <p:cNvPr id="10" name="ANS_251"/>
           <p:cNvSpPr txBox="1"/>
           <p:nvPr/>
         </p:nvSpPr>
@@ -24150,7 +24089,7 @@
       </p:sp>
       <p:sp>
         <p:nvSpPr>
-          <p:cNvPr id="11" name="ANS_253"/>
+          <p:cNvPr id="11" name="ANS_252"/>
           <p:cNvSpPr/>
           <p:nvPr/>
         </p:nvSpPr>
@@ -24170,7 +24109,7 @@
       </p:sp>
       <p:sp>
         <p:nvSpPr>
-          <p:cNvPr id="12" name="ANS_254"/>
+          <p:cNvPr id="12" name="ANS_253"/>
           <p:cNvSpPr txBox="1"/>
           <p:nvPr/>
         </p:nvSpPr>
@@ -24209,7 +24148,7 @@
       </p:sp>
       <p:sp>
         <p:nvSpPr>
-          <p:cNvPr id="13" name="ANS_255"/>
+          <p:cNvPr id="13" name="ANS_254"/>
           <p:cNvSpPr/>
           <p:nvPr/>
         </p:nvSpPr>
@@ -24229,7 +24168,7 @@
       </p:sp>
       <p:sp>
         <p:nvSpPr>
-          <p:cNvPr id="14" name="ANS_256"/>
+          <p:cNvPr id="14" name="ANS_255"/>
           <p:cNvSpPr txBox="1"/>
           <p:nvPr/>
         </p:nvSpPr>
@@ -26321,7 +26260,7 @@
       </p:sp>
       <p:sp>
         <p:nvSpPr>
-          <p:cNvPr id="7" name="ANS_257"/>
+          <p:cNvPr id="7" name="ANS_256"/>
           <p:cNvSpPr/>
           <p:nvPr/>
         </p:nvSpPr>
@@ -26348,7 +26287,7 @@
       </p:sp>
       <p:sp>
         <p:nvSpPr>
-          <p:cNvPr id="8" name="ANS_258"/>
+          <p:cNvPr id="8" name="ANS_257"/>
           <p:cNvSpPr txBox="1"/>
           <p:nvPr/>
         </p:nvSpPr>
@@ -26387,7 +26326,7 @@
       </p:sp>
       <p:sp>
         <p:nvSpPr>
-          <p:cNvPr id="9" name="ANS_259"/>
+          <p:cNvPr id="9" name="ANS_258"/>
           <p:cNvSpPr txBox="1"/>
           <p:nvPr/>
         </p:nvSpPr>
@@ -26426,7 +26365,7 @@
       </p:sp>
       <p:sp>
         <p:nvSpPr>
-          <p:cNvPr id="10" name="ANS_260"/>
+          <p:cNvPr id="10" name="ANS_259"/>
           <p:cNvSpPr txBox="1"/>
           <p:nvPr/>
         </p:nvSpPr>
@@ -26465,7 +26404,7 @@
       </p:sp>
       <p:sp>
         <p:nvSpPr>
-          <p:cNvPr id="11" name="ANS_261"/>
+          <p:cNvPr id="11" name="ANS_260"/>
           <p:cNvSpPr/>
           <p:nvPr/>
         </p:nvSpPr>
@@ -26485,7 +26424,7 @@
       </p:sp>
       <p:sp>
         <p:nvSpPr>
-          <p:cNvPr id="12" name="ANS_262"/>
+          <p:cNvPr id="12" name="ANS_261"/>
           <p:cNvSpPr txBox="1"/>
           <p:nvPr/>
         </p:nvSpPr>
@@ -26524,7 +26463,7 @@
       </p:sp>
       <p:sp>
         <p:nvSpPr>
-          <p:cNvPr id="13" name="ANS_263"/>
+          <p:cNvPr id="13" name="ANS_262"/>
           <p:cNvSpPr/>
           <p:nvPr/>
         </p:nvSpPr>
@@ -26544,7 +26483,7 @@
       </p:sp>
       <p:sp>
         <p:nvSpPr>
-          <p:cNvPr id="14" name="ANS_264"/>
+          <p:cNvPr id="14" name="ANS_263"/>
           <p:cNvSpPr txBox="1"/>
           <p:nvPr/>
         </p:nvSpPr>
@@ -26605,7 +26544,7 @@
       </p:sp>
       <p:sp>
         <p:nvSpPr>
-          <p:cNvPr id="15" name="ANS_265"/>
+          <p:cNvPr id="15" name="ANS_264"/>
           <p:cNvSpPr/>
           <p:nvPr/>
         </p:nvSpPr>
@@ -26625,7 +26564,7 @@
       </p:sp>
       <p:sp>
         <p:nvSpPr>
-          <p:cNvPr id="16" name="ANS_266"/>
+          <p:cNvPr id="16" name="ANS_265"/>
           <p:cNvSpPr txBox="1"/>
           <p:nvPr/>
         </p:nvSpPr>

--- a/courseware/202609_DSA_MOOC_Quiz_CH11-12.pptx
+++ b/courseware/202609_DSA_MOOC_Quiz_CH11-12.pptx
@@ -18440,7 +18440,7 @@
         <p:spPr>
           <a:xfrm>
             <a:off x="548640" y="1645920"/>
-            <a:ext cx="6309360" cy="316382"/>
+            <a:ext cx="6309360" cy="577901"/>
           </a:xfrm>
           <a:prstGeom prst="rect">
             <a:avLst/>
@@ -18464,7 +18464,7 @@
                 <a:ea typeface="Microsoft YaHei" pitchFamily="34" charset="-122"/>
                 <a:cs typeface="Microsoft YaHei" pitchFamily="34" charset="-120"/>
               </a:rPr>
-              <a:t>【待补题干】原资料缺少操作序列，本页暂不作答。</a:t>
+              <a:t>操作序列 &lt;插入 7，插入 8，插入 9，插入 6，插入 11，插入 10，删除 11&gt; 形成哪棵 Splay 树？</a:t>
             </a:r>
             <a:endParaRPr lang="en-US" sz="1560" dirty="0"/>
           </a:p>
@@ -18478,7 +18478,7 @@
         </p:nvSpPr>
         <p:spPr>
           <a:xfrm>
-            <a:off x="548640" y="2162007"/>
+            <a:off x="548640" y="2423526"/>
             <a:ext cx="6309360" cy="2366467"/>
           </a:xfrm>
           <a:prstGeom prst="roundRect">
@@ -18500,7 +18500,7 @@
         </p:nvSpPr>
         <p:spPr>
           <a:xfrm>
-            <a:off x="731520" y="2162007"/>
+            <a:off x="731520" y="2423526"/>
             <a:ext cx="6035040" cy="2366467"/>
           </a:xfrm>
           <a:prstGeom prst="rect">
@@ -18722,7 +18722,7 @@
         </p:nvSpPr>
         <p:spPr>
           <a:xfrm>
-            <a:off x="548640" y="4728180"/>
+            <a:off x="548640" y="4989698"/>
             <a:ext cx="3086100" cy="641909"/>
           </a:xfrm>
           <a:prstGeom prst="roundRect">
@@ -18744,7 +18744,7 @@
         </p:nvSpPr>
         <p:spPr>
           <a:xfrm>
-            <a:off x="548640" y="4728180"/>
+            <a:off x="548640" y="4989698"/>
             <a:ext cx="3086100" cy="641909"/>
           </a:xfrm>
           <a:prstGeom prst="rect">
@@ -18794,7 +18794,7 @@
         </p:nvSpPr>
         <p:spPr>
           <a:xfrm>
-            <a:off x="3771900" y="4728180"/>
+            <a:off x="3771900" y="4989698"/>
             <a:ext cx="3086100" cy="641909"/>
           </a:xfrm>
           <a:prstGeom prst="roundRect">
@@ -18816,7 +18816,7 @@
         </p:nvSpPr>
         <p:spPr>
           <a:xfrm>
-            <a:off x="3771900" y="4728180"/>
+            <a:off x="3771900" y="4989698"/>
             <a:ext cx="3086100" cy="641909"/>
           </a:xfrm>
           <a:prstGeom prst="rect">
@@ -18866,7 +18866,7 @@
         </p:nvSpPr>
         <p:spPr>
           <a:xfrm>
-            <a:off x="548640" y="5507248"/>
+            <a:off x="548640" y="5768767"/>
             <a:ext cx="3086100" cy="641909"/>
           </a:xfrm>
           <a:prstGeom prst="roundRect">
@@ -18888,7 +18888,7 @@
         </p:nvSpPr>
         <p:spPr>
           <a:xfrm>
-            <a:off x="548640" y="5507248"/>
+            <a:off x="548640" y="5768767"/>
             <a:ext cx="3086100" cy="641909"/>
           </a:xfrm>
           <a:prstGeom prst="rect">
@@ -18938,7 +18938,7 @@
         </p:nvSpPr>
         <p:spPr>
           <a:xfrm>
-            <a:off x="3771900" y="5507248"/>
+            <a:off x="3771900" y="5768767"/>
             <a:ext cx="3086100" cy="641909"/>
           </a:xfrm>
           <a:prstGeom prst="roundRect">
@@ -18960,7 +18960,7 @@
         </p:nvSpPr>
         <p:spPr>
           <a:xfrm>
-            <a:off x="3771900" y="5507248"/>
+            <a:off x="3771900" y="5768767"/>
             <a:ext cx="3086100" cy="641909"/>
           </a:xfrm>
           <a:prstGeom prst="rect">
@@ -19005,6 +19005,31 @@
       <p:sp>
         <p:nvSpPr>
           <p:cNvPr id="17" name="ANS_206"/>
+          <p:cNvSpPr/>
+          <p:nvPr/>
+        </p:nvSpPr>
+        <p:spPr>
+          <a:xfrm>
+            <a:off x="548640" y="4989698"/>
+            <a:ext cx="3086100" cy="641909"/>
+          </a:xfrm>
+          <a:prstGeom prst="roundRect">
+            <a:avLst>
+              <a:gd name="adj" fmla="val 14245"/>
+            </a:avLst>
+          </a:prstGeom>
+          <a:noFill/>
+          <a:ln w="38100">
+            <a:solidFill>
+              <a:srgbClr val="2E9E6B"/>
+            </a:solidFill>
+            <a:prstDash val="solid"/>
+          </a:ln>
+        </p:spPr>
+      </p:sp>
+      <p:sp>
+        <p:nvSpPr>
+          <p:cNvPr id="18" name="ANS_207"/>
           <p:cNvSpPr/>
           <p:nvPr/>
         </p:nvSpPr>
@@ -19031,7 +19056,7 @@
       </p:sp>
       <p:sp>
         <p:nvSpPr>
-          <p:cNvPr id="18" name="ANS_207"/>
+          <p:cNvPr id="19" name="ANS_208"/>
           <p:cNvSpPr txBox="1"/>
           <p:nvPr/>
         </p:nvSpPr>
@@ -19070,7 +19095,7 @@
       </p:sp>
       <p:sp>
         <p:nvSpPr>
-          <p:cNvPr id="19" name="ANS_208"/>
+          <p:cNvPr id="20" name="ANS_209"/>
           <p:cNvSpPr txBox="1"/>
           <p:nvPr/>
         </p:nvSpPr>
@@ -19101,7 +19126,7 @@
                 <a:ea typeface="Microsoft YaHei" pitchFamily="34" charset="-122"/>
                 <a:cs typeface="Microsoft YaHei" pitchFamily="34" charset="-120"/>
               </a:rPr>
-              <a:t>待补题干</a:t>
+              <a:t>A</a:t>
             </a:r>
             <a:endParaRPr lang="en-US" sz="4400" dirty="0"/>
           </a:p>
@@ -19109,7 +19134,7 @@
       </p:sp>
       <p:sp>
         <p:nvSpPr>
-          <p:cNvPr id="20" name="ANS_209"/>
+          <p:cNvPr id="21" name="ANS_210"/>
           <p:cNvSpPr txBox="1"/>
           <p:nvPr/>
         </p:nvSpPr>
@@ -19148,13 +19173,13 @@
       </p:sp>
       <p:sp>
         <p:nvSpPr>
-          <p:cNvPr id="21" name="ANS_210"/>
+          <p:cNvPr id="22" name="ANS_211"/>
           <p:cNvSpPr/>
           <p:nvPr/>
         </p:nvSpPr>
         <p:spPr>
           <a:xfrm>
-            <a:off x="7616952" y="2748534"/>
+            <a:off x="7616952" y="2740152"/>
             <a:ext cx="91440" cy="91440"/>
           </a:xfrm>
           <a:prstGeom prst="ellipse">
@@ -19168,14 +19193,14 @@
       </p:sp>
       <p:sp>
         <p:nvSpPr>
-          <p:cNvPr id="22" name="ANS_211"/>
+          <p:cNvPr id="23" name="ANS_212"/>
           <p:cNvSpPr txBox="1"/>
           <p:nvPr/>
         </p:nvSpPr>
         <p:spPr>
           <a:xfrm>
             <a:off x="7818120" y="2651760"/>
-            <a:ext cx="3520440" cy="909828"/>
+            <a:ext cx="3520440" cy="591312"/>
           </a:xfrm>
           <a:prstGeom prst="rect">
             <a:avLst/>
@@ -19191,7 +19216,7 @@
               <a:buNone/>
             </a:pPr>
             <a:r>
-              <a:rPr lang="en-US" sz="1700" dirty="0">
+              <a:rPr lang="en-US" sz="1600" dirty="0">
                 <a:solidFill>
                   <a:srgbClr val="2B2B2B"/>
                 </a:solidFill>
@@ -19199,21 +19224,21 @@
                 <a:ea typeface="Microsoft YaHei" pitchFamily="34" charset="-122"/>
                 <a:cs typeface="Microsoft YaHei" pitchFamily="34" charset="-120"/>
               </a:rPr>
-              <a:t>方法同上题：每次插入、查找后把该结点 splay 到根；删除时先 splay 到根，再合并左右子树。</a:t>
-            </a:r>
-            <a:endParaRPr lang="en-US" sz="1700" dirty="0"/>
-          </a:p>
-        </p:txBody>
-      </p:sp>
-      <p:sp>
-        <p:nvSpPr>
-          <p:cNvPr id="23" name="ANS_212"/>
+              <a:t>插 7、8、9：每次都插在根的右边，zig 一次 → 9(8(7, −), −)</a:t>
+            </a:r>
+            <a:endParaRPr lang="en-US" sz="1600" dirty="0"/>
+          </a:p>
+        </p:txBody>
+      </p:sp>
+      <p:sp>
+        <p:nvSpPr>
+          <p:cNvPr id="24" name="ANS_213"/>
           <p:cNvSpPr/>
           <p:nvPr/>
         </p:nvSpPr>
         <p:spPr>
           <a:xfrm>
-            <a:off x="7616952" y="3798265"/>
+            <a:off x="7616952" y="3463138"/>
             <a:ext cx="91440" cy="91440"/>
           </a:xfrm>
           <a:prstGeom prst="ellipse">
@@ -19227,14 +19252,14 @@
       </p:sp>
       <p:sp>
         <p:nvSpPr>
-          <p:cNvPr id="24" name="ANS_213"/>
+          <p:cNvPr id="25" name="ANS_214"/>
           <p:cNvSpPr txBox="1"/>
           <p:nvPr/>
         </p:nvSpPr>
         <p:spPr>
           <a:xfrm>
-            <a:off x="7818120" y="3701491"/>
-            <a:ext cx="3520440" cy="624840"/>
+            <a:off x="7818120" y="3374746"/>
+            <a:ext cx="3520440" cy="1127760"/>
           </a:xfrm>
           <a:prstGeom prst="rect">
             <a:avLst/>
@@ -19250,7 +19275,7 @@
               <a:buNone/>
             </a:pPr>
             <a:r>
-              <a:rPr lang="en-US" sz="1700" dirty="0">
+              <a:rPr lang="en-US" sz="1600" dirty="0">
                 <a:solidFill>
                   <a:srgbClr val="2B2B2B"/>
                 </a:solidFill>
@@ -19258,9 +19283,127 @@
                 <a:ea typeface="Microsoft YaHei" pitchFamily="34" charset="-122"/>
                 <a:cs typeface="Microsoft YaHei" pitchFamily="34" charset="-120"/>
               </a:rPr>
-              <a:t>补齐操作序列与删除约定后，重新模拟并确定答案。</a:t>
-            </a:r>
-            <a:endParaRPr lang="en-US" sz="1700" dirty="0"/>
+              <a:t>插 6：zig-zig 再 zig 到根 → 6(−, 9(7(−, 8), −))；插 11：zig-zig → 11(9(6(−, 7(−, 8)), −), −)</a:t>
+            </a:r>
+            <a:endParaRPr lang="en-US" sz="1600" dirty="0"/>
+          </a:p>
+        </p:txBody>
+      </p:sp>
+      <p:sp>
+        <p:nvSpPr>
+          <p:cNvPr id="26" name="ANS_215"/>
+          <p:cNvSpPr/>
+          <p:nvPr/>
+        </p:nvSpPr>
+        <p:spPr>
+          <a:xfrm>
+            <a:off x="7616952" y="4722571"/>
+            <a:ext cx="91440" cy="91440"/>
+          </a:xfrm>
+          <a:prstGeom prst="ellipse">
+            <a:avLst/>
+          </a:prstGeom>
+          <a:solidFill>
+            <a:srgbClr val="F2B134"/>
+          </a:solidFill>
+          <a:ln/>
+        </p:spPr>
+      </p:sp>
+      <p:sp>
+        <p:nvSpPr>
+          <p:cNvPr id="27" name="ANS_216"/>
+          <p:cNvSpPr txBox="1"/>
+          <p:nvPr/>
+        </p:nvSpPr>
+        <p:spPr>
+          <a:xfrm>
+            <a:off x="7818120" y="4634179"/>
+            <a:ext cx="3520440" cy="591312"/>
+          </a:xfrm>
+          <a:prstGeom prst="rect">
+            <a:avLst/>
+          </a:prstGeom>
+          <a:noFill/>
+          <a:ln/>
+        </p:spPr>
+        <p:txBody>
+          <a:bodyPr wrap="square" lIns="0" tIns="0" rIns="0" bIns="0" rtlCol="0" anchor="t"/>
+          <a:lstStyle/>
+          <a:p>
+            <a:pPr algn="l" indent="0" marL="0">
+              <a:buNone/>
+            </a:pPr>
+            <a:r>
+              <a:rPr lang="en-US" sz="1600" dirty="0">
+                <a:solidFill>
+                  <a:srgbClr val="2B2B2B"/>
+                </a:solidFill>
+                <a:latin typeface="Microsoft YaHei" pitchFamily="34" charset="0"/>
+                <a:ea typeface="Microsoft YaHei" pitchFamily="34" charset="-122"/>
+                <a:cs typeface="Microsoft YaHei" pitchFamily="34" charset="-120"/>
+              </a:rPr>
+              <a:t>插 10：zig-zag 到根 → 10(9(6(−, 7(−, 8)), −), 11)</a:t>
+            </a:r>
+            <a:endParaRPr lang="en-US" sz="1600" dirty="0"/>
+          </a:p>
+        </p:txBody>
+      </p:sp>
+      <p:sp>
+        <p:nvSpPr>
+          <p:cNvPr id="28" name="ANS_217"/>
+          <p:cNvSpPr/>
+          <p:nvPr/>
+        </p:nvSpPr>
+        <p:spPr>
+          <a:xfrm>
+            <a:off x="7616952" y="5445557"/>
+            <a:ext cx="91440" cy="91440"/>
+          </a:xfrm>
+          <a:prstGeom prst="ellipse">
+            <a:avLst/>
+          </a:prstGeom>
+          <a:solidFill>
+            <a:srgbClr val="F2B134"/>
+          </a:solidFill>
+          <a:ln/>
+        </p:spPr>
+      </p:sp>
+      <p:sp>
+        <p:nvSpPr>
+          <p:cNvPr id="29" name="ANS_218"/>
+          <p:cNvSpPr txBox="1"/>
+          <p:nvPr/>
+        </p:nvSpPr>
+        <p:spPr>
+          <a:xfrm>
+            <a:off x="7818120" y="5357165"/>
+            <a:ext cx="3520440" cy="859536"/>
+          </a:xfrm>
+          <a:prstGeom prst="rect">
+            <a:avLst/>
+          </a:prstGeom>
+          <a:noFill/>
+          <a:ln/>
+        </p:spPr>
+        <p:txBody>
+          <a:bodyPr wrap="square" lIns="0" tIns="0" rIns="0" bIns="0" rtlCol="0" anchor="t"/>
+          <a:lstStyle/>
+          <a:p>
+            <a:pPr algn="l" indent="0" marL="0">
+              <a:buNone/>
+            </a:pPr>
+            <a:r>
+              <a:rPr lang="en-US" sz="1600" dirty="0">
+                <a:solidFill>
+                  <a:srgbClr val="2B2B2B"/>
+                </a:solidFill>
+                <a:latin typeface="Microsoft YaHei" pitchFamily="34" charset="0"/>
+                <a:ea typeface="Microsoft YaHei" pitchFamily="34" charset="-122"/>
+                <a:cs typeface="Microsoft YaHei" pitchFamily="34" charset="-120"/>
+              </a:rPr>
+              <a:t>删 11：11 zig 到根后右子树为空，左子树直接成为新树 → 10(9(6(−, 7(−, 8)), −), −)，即 A</a:t>
+            </a:r>
+            <a:endParaRPr lang="en-US" sz="1600" dirty="0"/>
           </a:p>
         </p:txBody>
       </p:sp>
@@ -19563,6 +19706,181 @@
                                         <p:cTn id="28" dur="400"/>
                                         <p:tgtEl>
                                           <p:spTgt spid="24"/>
+                                        </p:tgtEl>
+                                      </p:cBhvr>
+                                    </p:animEffect>
+                                  </p:childTnLst>
+                                </p:cTn>
+                              </p:par>
+                              <p:par>
+                                <p:cTn id="29" presetID="10" presetClass="entr" presetSubtype="0" fill="hold" grpId="0" nodeType="withEffect">
+                                  <p:stCondLst>
+                                    <p:cond delay="0"/>
+                                  </p:stCondLst>
+                                  <p:childTnLst>
+                                    <p:set>
+                                      <p:cBhvr>
+                                        <p:cTn id="30" dur="1" fill="hold">
+                                          <p:stCondLst>
+                                            <p:cond delay="0"/>
+                                          </p:stCondLst>
+                                        </p:cTn>
+                                        <p:tgtEl>
+                                          <p:spTgt spid="25"/>
+                                        </p:tgtEl>
+                                        <p:attrNameLst>
+                                          <p:attrName>style.visibility</p:attrName>
+                                        </p:attrNameLst>
+                                      </p:cBhvr>
+                                      <p:to>
+                                        <p:strVal val="visible"/>
+                                      </p:to>
+                                    </p:set>
+                                    <p:animEffect transition="in" filter="fade">
+                                      <p:cBhvr>
+                                        <p:cTn id="31" dur="400"/>
+                                        <p:tgtEl>
+                                          <p:spTgt spid="25"/>
+                                        </p:tgtEl>
+                                      </p:cBhvr>
+                                    </p:animEffect>
+                                  </p:childTnLst>
+                                </p:cTn>
+                              </p:par>
+                              <p:par>
+                                <p:cTn id="32" presetID="10" presetClass="entr" presetSubtype="0" fill="hold" grpId="0" nodeType="withEffect">
+                                  <p:stCondLst>
+                                    <p:cond delay="0"/>
+                                  </p:stCondLst>
+                                  <p:childTnLst>
+                                    <p:set>
+                                      <p:cBhvr>
+                                        <p:cTn id="33" dur="1" fill="hold">
+                                          <p:stCondLst>
+                                            <p:cond delay="0"/>
+                                          </p:stCondLst>
+                                        </p:cTn>
+                                        <p:tgtEl>
+                                          <p:spTgt spid="26"/>
+                                        </p:tgtEl>
+                                        <p:attrNameLst>
+                                          <p:attrName>style.visibility</p:attrName>
+                                        </p:attrNameLst>
+                                      </p:cBhvr>
+                                      <p:to>
+                                        <p:strVal val="visible"/>
+                                      </p:to>
+                                    </p:set>
+                                    <p:animEffect transition="in" filter="fade">
+                                      <p:cBhvr>
+                                        <p:cTn id="34" dur="400"/>
+                                        <p:tgtEl>
+                                          <p:spTgt spid="26"/>
+                                        </p:tgtEl>
+                                      </p:cBhvr>
+                                    </p:animEffect>
+                                  </p:childTnLst>
+                                </p:cTn>
+                              </p:par>
+                              <p:par>
+                                <p:cTn id="35" presetID="10" presetClass="entr" presetSubtype="0" fill="hold" grpId="0" nodeType="withEffect">
+                                  <p:stCondLst>
+                                    <p:cond delay="0"/>
+                                  </p:stCondLst>
+                                  <p:childTnLst>
+                                    <p:set>
+                                      <p:cBhvr>
+                                        <p:cTn id="36" dur="1" fill="hold">
+                                          <p:stCondLst>
+                                            <p:cond delay="0"/>
+                                          </p:stCondLst>
+                                        </p:cTn>
+                                        <p:tgtEl>
+                                          <p:spTgt spid="27"/>
+                                        </p:tgtEl>
+                                        <p:attrNameLst>
+                                          <p:attrName>style.visibility</p:attrName>
+                                        </p:attrNameLst>
+                                      </p:cBhvr>
+                                      <p:to>
+                                        <p:strVal val="visible"/>
+                                      </p:to>
+                                    </p:set>
+                                    <p:animEffect transition="in" filter="fade">
+                                      <p:cBhvr>
+                                        <p:cTn id="37" dur="400"/>
+                                        <p:tgtEl>
+                                          <p:spTgt spid="27"/>
+                                        </p:tgtEl>
+                                      </p:cBhvr>
+                                    </p:animEffect>
+                                  </p:childTnLst>
+                                </p:cTn>
+                              </p:par>
+                              <p:par>
+                                <p:cTn id="38" presetID="10" presetClass="entr" presetSubtype="0" fill="hold" grpId="0" nodeType="withEffect">
+                                  <p:stCondLst>
+                                    <p:cond delay="0"/>
+                                  </p:stCondLst>
+                                  <p:childTnLst>
+                                    <p:set>
+                                      <p:cBhvr>
+                                        <p:cTn id="39" dur="1" fill="hold">
+                                          <p:stCondLst>
+                                            <p:cond delay="0"/>
+                                          </p:stCondLst>
+                                        </p:cTn>
+                                        <p:tgtEl>
+                                          <p:spTgt spid="28"/>
+                                        </p:tgtEl>
+                                        <p:attrNameLst>
+                                          <p:attrName>style.visibility</p:attrName>
+                                        </p:attrNameLst>
+                                      </p:cBhvr>
+                                      <p:to>
+                                        <p:strVal val="visible"/>
+                                      </p:to>
+                                    </p:set>
+                                    <p:animEffect transition="in" filter="fade">
+                                      <p:cBhvr>
+                                        <p:cTn id="40" dur="400"/>
+                                        <p:tgtEl>
+                                          <p:spTgt spid="28"/>
+                                        </p:tgtEl>
+                                      </p:cBhvr>
+                                    </p:animEffect>
+                                  </p:childTnLst>
+                                </p:cTn>
+                              </p:par>
+                              <p:par>
+                                <p:cTn id="41" presetID="10" presetClass="entr" presetSubtype="0" fill="hold" grpId="0" nodeType="withEffect">
+                                  <p:stCondLst>
+                                    <p:cond delay="0"/>
+                                  </p:stCondLst>
+                                  <p:childTnLst>
+                                    <p:set>
+                                      <p:cBhvr>
+                                        <p:cTn id="42" dur="1" fill="hold">
+                                          <p:stCondLst>
+                                            <p:cond delay="0"/>
+                                          </p:stCondLst>
+                                        </p:cTn>
+                                        <p:tgtEl>
+                                          <p:spTgt spid="29"/>
+                                        </p:tgtEl>
+                                        <p:attrNameLst>
+                                          <p:attrName>style.visibility</p:attrName>
+                                        </p:attrNameLst>
+                                      </p:cBhvr>
+                                      <p:to>
+                                        <p:strVal val="visible"/>
+                                      </p:to>
+                                    </p:set>
+                                    <p:animEffect transition="in" filter="fade">
+                                      <p:cBhvr>
+                                        <p:cTn id="43" dur="400"/>
+                                        <p:tgtEl>
+                                          <p:spTgt spid="29"/>
                                         </p:tgtEl>
                                       </p:cBhvr>
                                     </p:animEffect>
@@ -19605,6 +19923,11 @@
       <p:bldP spid="22" grpId="0" animBg="1"/>
       <p:bldP spid="23" grpId="0" animBg="1"/>
       <p:bldP spid="24" grpId="0" animBg="1"/>
+      <p:bldP spid="25" grpId="0" animBg="1"/>
+      <p:bldP spid="26" grpId="0" animBg="1"/>
+      <p:bldP spid="27" grpId="0" animBg="1"/>
+      <p:bldP spid="28" grpId="0" animBg="1"/>
+      <p:bldP spid="29" grpId="0" animBg="1"/>
     </p:bldLst>
   </p:timing>
 </p:sld>
@@ -20348,7 +20671,7 @@
       </p:sp>
       <p:sp>
         <p:nvSpPr>
-          <p:cNvPr id="21" name="ANS_214"/>
+          <p:cNvPr id="21" name="ANS_219"/>
           <p:cNvSpPr/>
           <p:nvPr/>
         </p:nvSpPr>
@@ -20373,7 +20696,7 @@
       </p:sp>
       <p:sp>
         <p:nvSpPr>
-          <p:cNvPr id="22" name="ANS_215"/>
+          <p:cNvPr id="22" name="ANS_220"/>
           <p:cNvSpPr/>
           <p:nvPr/>
         </p:nvSpPr>
@@ -20400,7 +20723,7 @@
       </p:sp>
       <p:sp>
         <p:nvSpPr>
-          <p:cNvPr id="23" name="ANS_216"/>
+          <p:cNvPr id="23" name="ANS_221"/>
           <p:cNvSpPr txBox="1"/>
           <p:nvPr/>
         </p:nvSpPr>
@@ -20439,7 +20762,7 @@
       </p:sp>
       <p:sp>
         <p:nvSpPr>
-          <p:cNvPr id="24" name="ANS_217"/>
+          <p:cNvPr id="24" name="ANS_222"/>
           <p:cNvSpPr txBox="1"/>
           <p:nvPr/>
         </p:nvSpPr>
@@ -20478,7 +20801,7 @@
       </p:sp>
       <p:sp>
         <p:nvSpPr>
-          <p:cNvPr id="25" name="ANS_218"/>
+          <p:cNvPr id="25" name="ANS_223"/>
           <p:cNvSpPr txBox="1"/>
           <p:nvPr/>
         </p:nvSpPr>
@@ -20517,7 +20840,7 @@
       </p:sp>
       <p:sp>
         <p:nvSpPr>
-          <p:cNvPr id="26" name="ANS_219"/>
+          <p:cNvPr id="26" name="ANS_224"/>
           <p:cNvSpPr/>
           <p:nvPr/>
         </p:nvSpPr>
@@ -20537,7 +20860,7 @@
       </p:sp>
       <p:sp>
         <p:nvSpPr>
-          <p:cNvPr id="27" name="ANS_220"/>
+          <p:cNvPr id="27" name="ANS_225"/>
           <p:cNvSpPr txBox="1"/>
           <p:nvPr/>
         </p:nvSpPr>
@@ -20576,7 +20899,7 @@
       </p:sp>
       <p:sp>
         <p:nvSpPr>
-          <p:cNvPr id="28" name="ANS_221"/>
+          <p:cNvPr id="28" name="ANS_226"/>
           <p:cNvSpPr/>
           <p:nvPr/>
         </p:nvSpPr>
@@ -20596,7 +20919,7 @@
       </p:sp>
       <p:sp>
         <p:nvSpPr>
-          <p:cNvPr id="29" name="ANS_222"/>
+          <p:cNvPr id="29" name="ANS_227"/>
           <p:cNvSpPr txBox="1"/>
           <p:nvPr/>
         </p:nvSpPr>
@@ -20635,7 +20958,7 @@
       </p:sp>
       <p:sp>
         <p:nvSpPr>
-          <p:cNvPr id="30" name="ANS_223"/>
+          <p:cNvPr id="30" name="ANS_228"/>
           <p:cNvSpPr/>
           <p:nvPr/>
         </p:nvSpPr>
@@ -20655,7 +20978,7 @@
       </p:sp>
       <p:sp>
         <p:nvSpPr>
-          <p:cNvPr id="31" name="ANS_224"/>
+          <p:cNvPr id="31" name="ANS_229"/>
           <p:cNvSpPr txBox="1"/>
           <p:nvPr/>
         </p:nvSpPr>
@@ -21492,7 +21815,7 @@
       </p:sp>
       <p:sp>
         <p:nvSpPr>
-          <p:cNvPr id="9" name="ANS_225"/>
+          <p:cNvPr id="9" name="ANS_230"/>
           <p:cNvSpPr/>
           <p:nvPr/>
         </p:nvSpPr>
@@ -21519,7 +21842,7 @@
       </p:sp>
       <p:sp>
         <p:nvSpPr>
-          <p:cNvPr id="10" name="ANS_226"/>
+          <p:cNvPr id="10" name="ANS_231"/>
           <p:cNvSpPr txBox="1"/>
           <p:nvPr/>
         </p:nvSpPr>
@@ -21558,7 +21881,7 @@
       </p:sp>
       <p:sp>
         <p:nvSpPr>
-          <p:cNvPr id="11" name="ANS_227"/>
+          <p:cNvPr id="11" name="ANS_232"/>
           <p:cNvSpPr txBox="1"/>
           <p:nvPr/>
         </p:nvSpPr>
@@ -21597,7 +21920,7 @@
       </p:sp>
       <p:sp>
         <p:nvSpPr>
-          <p:cNvPr id="12" name="ANS_228"/>
+          <p:cNvPr id="12" name="ANS_233"/>
           <p:cNvSpPr txBox="1"/>
           <p:nvPr/>
         </p:nvSpPr>
@@ -21636,7 +21959,7 @@
       </p:sp>
       <p:sp>
         <p:nvSpPr>
-          <p:cNvPr id="13" name="ANS_229"/>
+          <p:cNvPr id="13" name="ANS_234"/>
           <p:cNvSpPr/>
           <p:nvPr/>
         </p:nvSpPr>
@@ -21656,7 +21979,7 @@
       </p:sp>
       <p:sp>
         <p:nvSpPr>
-          <p:cNvPr id="14" name="ANS_230"/>
+          <p:cNvPr id="14" name="ANS_235"/>
           <p:cNvSpPr txBox="1"/>
           <p:nvPr/>
         </p:nvSpPr>
@@ -21695,7 +22018,7 @@
       </p:sp>
       <p:sp>
         <p:nvSpPr>
-          <p:cNvPr id="15" name="ANS_231"/>
+          <p:cNvPr id="15" name="ANS_236"/>
           <p:cNvSpPr/>
           <p:nvPr/>
         </p:nvSpPr>
@@ -21715,7 +22038,7 @@
       </p:sp>
       <p:sp>
         <p:nvSpPr>
-          <p:cNvPr id="16" name="ANS_232"/>
+          <p:cNvPr id="16" name="ANS_237"/>
           <p:cNvSpPr txBox="1"/>
           <p:nvPr/>
         </p:nvSpPr>
@@ -21754,7 +22077,7 @@
       </p:sp>
       <p:sp>
         <p:nvSpPr>
-          <p:cNvPr id="17" name="ANS_233"/>
+          <p:cNvPr id="17" name="ANS_238"/>
           <p:cNvSpPr/>
           <p:nvPr/>
         </p:nvSpPr>
@@ -21774,7 +22097,7 @@
       </p:sp>
       <p:sp>
         <p:nvSpPr>
-          <p:cNvPr id="18" name="ANS_234"/>
+          <p:cNvPr id="18" name="ANS_239"/>
           <p:cNvSpPr txBox="1"/>
           <p:nvPr/>
         </p:nvSpPr>
@@ -22823,7 +23146,7 @@
       </p:sp>
       <p:sp>
         <p:nvSpPr>
-          <p:cNvPr id="19" name="ANS_235"/>
+          <p:cNvPr id="19" name="ANS_240"/>
           <p:cNvSpPr/>
           <p:nvPr/>
         </p:nvSpPr>
@@ -22848,7 +23171,7 @@
       </p:sp>
       <p:sp>
         <p:nvSpPr>
-          <p:cNvPr id="20" name="ANS_236"/>
+          <p:cNvPr id="20" name="ANS_241"/>
           <p:cNvSpPr/>
           <p:nvPr/>
         </p:nvSpPr>
@@ -22873,7 +23196,7 @@
       </p:sp>
       <p:sp>
         <p:nvSpPr>
-          <p:cNvPr id="21" name="ANS_237"/>
+          <p:cNvPr id="21" name="ANS_242"/>
           <p:cNvSpPr/>
           <p:nvPr/>
         </p:nvSpPr>
@@ -22898,7 +23221,7 @@
       </p:sp>
       <p:sp>
         <p:nvSpPr>
-          <p:cNvPr id="22" name="ANS_238"/>
+          <p:cNvPr id="22" name="ANS_243"/>
           <p:cNvSpPr/>
           <p:nvPr/>
         </p:nvSpPr>
@@ -22925,7 +23248,7 @@
       </p:sp>
       <p:sp>
         <p:nvSpPr>
-          <p:cNvPr id="23" name="ANS_239"/>
+          <p:cNvPr id="23" name="ANS_244"/>
           <p:cNvSpPr txBox="1"/>
           <p:nvPr/>
         </p:nvSpPr>
@@ -22964,7 +23287,7 @@
       </p:sp>
       <p:sp>
         <p:nvSpPr>
-          <p:cNvPr id="24" name="ANS_240"/>
+          <p:cNvPr id="24" name="ANS_245"/>
           <p:cNvSpPr txBox="1"/>
           <p:nvPr/>
         </p:nvSpPr>
@@ -23003,7 +23326,7 @@
       </p:sp>
       <p:sp>
         <p:nvSpPr>
-          <p:cNvPr id="25" name="ANS_241"/>
+          <p:cNvPr id="25" name="ANS_246"/>
           <p:cNvSpPr txBox="1"/>
           <p:nvPr/>
         </p:nvSpPr>
@@ -23042,7 +23365,7 @@
       </p:sp>
       <p:sp>
         <p:nvSpPr>
-          <p:cNvPr id="26" name="ANS_242"/>
+          <p:cNvPr id="26" name="ANS_247"/>
           <p:cNvSpPr/>
           <p:nvPr/>
         </p:nvSpPr>
@@ -23062,7 +23385,7 @@
       </p:sp>
       <p:sp>
         <p:nvSpPr>
-          <p:cNvPr id="27" name="ANS_243"/>
+          <p:cNvPr id="27" name="ANS_248"/>
           <p:cNvSpPr txBox="1"/>
           <p:nvPr/>
         </p:nvSpPr>
@@ -23101,7 +23424,7 @@
       </p:sp>
       <p:sp>
         <p:nvSpPr>
-          <p:cNvPr id="28" name="ANS_244"/>
+          <p:cNvPr id="28" name="ANS_249"/>
           <p:cNvSpPr/>
           <p:nvPr/>
         </p:nvSpPr>
@@ -23121,7 +23444,7 @@
       </p:sp>
       <p:sp>
         <p:nvSpPr>
-          <p:cNvPr id="29" name="ANS_245"/>
+          <p:cNvPr id="29" name="ANS_250"/>
           <p:cNvSpPr txBox="1"/>
           <p:nvPr/>
         </p:nvSpPr>
@@ -23160,7 +23483,7 @@
       </p:sp>
       <p:sp>
         <p:nvSpPr>
-          <p:cNvPr id="30" name="ANS_246"/>
+          <p:cNvPr id="30" name="ANS_251"/>
           <p:cNvSpPr/>
           <p:nvPr/>
         </p:nvSpPr>
@@ -23180,7 +23503,7 @@
       </p:sp>
       <p:sp>
         <p:nvSpPr>
-          <p:cNvPr id="31" name="ANS_247"/>
+          <p:cNvPr id="31" name="ANS_252"/>
           <p:cNvSpPr txBox="1"/>
           <p:nvPr/>
         </p:nvSpPr>
@@ -23945,7 +24268,7 @@
       </p:sp>
       <p:sp>
         <p:nvSpPr>
-          <p:cNvPr id="7" name="ANS_248"/>
+          <p:cNvPr id="7" name="ANS_253"/>
           <p:cNvSpPr/>
           <p:nvPr/>
         </p:nvSpPr>
@@ -23972,7 +24295,7 @@
       </p:sp>
       <p:sp>
         <p:nvSpPr>
-          <p:cNvPr id="8" name="ANS_249"/>
+          <p:cNvPr id="8" name="ANS_254"/>
           <p:cNvSpPr txBox="1"/>
           <p:nvPr/>
         </p:nvSpPr>
@@ -24011,7 +24334,7 @@
       </p:sp>
       <p:sp>
         <p:nvSpPr>
-          <p:cNvPr id="9" name="ANS_250"/>
+          <p:cNvPr id="9" name="ANS_255"/>
           <p:cNvSpPr txBox="1"/>
           <p:nvPr/>
         </p:nvSpPr>
@@ -24050,7 +24373,7 @@
       </p:sp>
       <p:sp>
         <p:nvSpPr>
-          <p:cNvPr id="10" name="ANS_251"/>
+          <p:cNvPr id="10" name="ANS_256"/>
           <p:cNvSpPr txBox="1"/>
           <p:nvPr/>
         </p:nvSpPr>
@@ -24089,7 +24412,7 @@
       </p:sp>
       <p:sp>
         <p:nvSpPr>
-          <p:cNvPr id="11" name="ANS_252"/>
+          <p:cNvPr id="11" name="ANS_257"/>
           <p:cNvSpPr/>
           <p:nvPr/>
         </p:nvSpPr>
@@ -24109,7 +24432,7 @@
       </p:sp>
       <p:sp>
         <p:nvSpPr>
-          <p:cNvPr id="12" name="ANS_253"/>
+          <p:cNvPr id="12" name="ANS_258"/>
           <p:cNvSpPr txBox="1"/>
           <p:nvPr/>
         </p:nvSpPr>
@@ -24148,7 +24471,7 @@
       </p:sp>
       <p:sp>
         <p:nvSpPr>
-          <p:cNvPr id="13" name="ANS_254"/>
+          <p:cNvPr id="13" name="ANS_259"/>
           <p:cNvSpPr/>
           <p:nvPr/>
         </p:nvSpPr>
@@ -24168,7 +24491,7 @@
       </p:sp>
       <p:sp>
         <p:nvSpPr>
-          <p:cNvPr id="14" name="ANS_255"/>
+          <p:cNvPr id="14" name="ANS_260"/>
           <p:cNvSpPr txBox="1"/>
           <p:nvPr/>
         </p:nvSpPr>
@@ -26260,7 +26583,7 @@
       </p:sp>
       <p:sp>
         <p:nvSpPr>
-          <p:cNvPr id="7" name="ANS_256"/>
+          <p:cNvPr id="7" name="ANS_261"/>
           <p:cNvSpPr/>
           <p:nvPr/>
         </p:nvSpPr>
@@ -26287,7 +26610,7 @@
       </p:sp>
       <p:sp>
         <p:nvSpPr>
-          <p:cNvPr id="8" name="ANS_257"/>
+          <p:cNvPr id="8" name="ANS_262"/>
           <p:cNvSpPr txBox="1"/>
           <p:nvPr/>
         </p:nvSpPr>
@@ -26326,7 +26649,7 @@
       </p:sp>
       <p:sp>
         <p:nvSpPr>
-          <p:cNvPr id="9" name="ANS_258"/>
+          <p:cNvPr id="9" name="ANS_263"/>
           <p:cNvSpPr txBox="1"/>
           <p:nvPr/>
         </p:nvSpPr>
@@ -26365,7 +26688,7 @@
       </p:sp>
       <p:sp>
         <p:nvSpPr>
-          <p:cNvPr id="10" name="ANS_259"/>
+          <p:cNvPr id="10" name="ANS_264"/>
           <p:cNvSpPr txBox="1"/>
           <p:nvPr/>
         </p:nvSpPr>
@@ -26404,7 +26727,7 @@
       </p:sp>
       <p:sp>
         <p:nvSpPr>
-          <p:cNvPr id="11" name="ANS_260"/>
+          <p:cNvPr id="11" name="ANS_265"/>
           <p:cNvSpPr/>
           <p:nvPr/>
         </p:nvSpPr>
@@ -26424,7 +26747,7 @@
       </p:sp>
       <p:sp>
         <p:nvSpPr>
-          <p:cNvPr id="12" name="ANS_261"/>
+          <p:cNvPr id="12" name="ANS_266"/>
           <p:cNvSpPr txBox="1"/>
           <p:nvPr/>
         </p:nvSpPr>
@@ -26463,7 +26786,7 @@
       </p:sp>
       <p:sp>
         <p:nvSpPr>
-          <p:cNvPr id="13" name="ANS_262"/>
+          <p:cNvPr id="13" name="ANS_267"/>
           <p:cNvSpPr/>
           <p:nvPr/>
         </p:nvSpPr>
@@ -26483,7 +26806,7 @@
       </p:sp>
       <p:sp>
         <p:nvSpPr>
-          <p:cNvPr id="14" name="ANS_263"/>
+          <p:cNvPr id="14" name="ANS_268"/>
           <p:cNvSpPr txBox="1"/>
           <p:nvPr/>
         </p:nvSpPr>
@@ -26544,7 +26867,7 @@
       </p:sp>
       <p:sp>
         <p:nvSpPr>
-          <p:cNvPr id="15" name="ANS_264"/>
+          <p:cNvPr id="15" name="ANS_269"/>
           <p:cNvSpPr/>
           <p:nvPr/>
         </p:nvSpPr>
@@ -26564,7 +26887,7 @@
       </p:sp>
       <p:sp>
         <p:nvSpPr>
-          <p:cNvPr id="16" name="ANS_265"/>
+          <p:cNvPr id="16" name="ANS_270"/>
           <p:cNvSpPr txBox="1"/>
           <p:nvPr/>
         </p:nvSpPr>
